--- a/dist/초2/사회·역사/변화와다양성/초2_사회·역사_변화와다양성_02_서로다른생활_학생용.pptx
+++ b/dist/초2/사회·역사/변화와다양성/초2_사회·역사_변화와다양성_02_서로다른생활_학생용.pptx
@@ -120,13 +120,13 @@
   <p:extLst>
     <p:ext uri="{521415D9-36F7-43E2-AB2F-B90AF26B5E84}">
       <p14:sectionLst xmlns:p14="http://schemas.microsoft.com/office/powerpoint/2010/main">
-        <p14:section name="도입" id="{1c1d06b4-7328-298e-d2c8-4999f3dd41ab}">
+        <p14:section name="도입" id="{d54b51cc-246c-7d73-ec19-468c9c4f41c2}">
           <p14:sldIdLst>
             <p14:sldId id="256"/>
             <p14:sldId id="257"/>
           </p14:sldIdLst>
         </p14:section>
-        <p14:section name="개념" id="{95b6f687-b318-cca4-79a7-4427943f230b}">
+        <p14:section name="개념" id="{c7b7e462-711c-8c83-6d31-53ace2e2cbdd}">
           <p14:sldIdLst>
             <p14:sldId id="258"/>
             <p14:sldId id="259"/>
@@ -134,7 +134,7 @@
             <p14:sldId id="263"/>
           </p14:sldIdLst>
         </p14:section>
-        <p14:section name="연습" id="{abce8f26-7aa1-ef02-3d85-ff06c57adbc8}">
+        <p14:section name="연습" id="{6de5b952-8916-4a49-eab6-91f486e8497b}">
           <p14:sldIdLst>
             <p14:sldId id="261"/>
             <p14:sldId id="262"/>
@@ -142,24 +142,24 @@
             <p14:sldId id="265"/>
           </p14:sldIdLst>
         </p14:section>
-        <p14:section name="개념" id="{2cd6922d-1085-12b2-c58b-d4d58dbccb7c}">
+        <p14:section name="개념" id="{1270012d-d2f9-3c86-92d6-c199f5c9c740}">
           <p14:sldIdLst/>
         </p14:section>
-        <p14:section name="연습" id="{2f07f621-b08b-7c19-6249-664f8ea9d976}">
+        <p14:section name="연습" id="{3da373cc-cfb5-0a12-b43d-5e80fc6a36f5}">
           <p14:sldIdLst/>
         </p14:section>
-        <p14:section name="확인" id="{bc61b68b-0be0-3b8e-15b3-79d5f04bb22c}">
+        <p14:section name="확인" id="{2525ae16-730f-69a5-e778-3cd0caa6a8a0}">
           <p14:sldIdLst>
             <p14:sldId id="266"/>
             <p14:sldId id="267"/>
           </p14:sldIdLst>
         </p14:section>
-        <p14:section name="정리" id="{4e3a75e3-022e-24c1-c196-52904e495b43}">
+        <p14:section name="정리" id="{a038bae9-50d1-785e-34e4-f68eabdf13d7}">
           <p14:sldIdLst>
             <p14:sldId id="268"/>
           </p14:sldIdLst>
         </p14:section>
-        <p14:section name="보충" id="{d9aad559-35c9-75ea-7da5-fd3dc7cf2d7e}">
+        <p14:section name="보충" id="{1033bd65-46fb-4d9f-2b44-36ce502b82a9}">
           <p14:sldIdLst>
             <p14:sldId id="269"/>
           </p14:sldIdLst>
